--- a/LLM_and_Enterprise_RAG_Bootcamp/Slides/Week_05_vision.pptx
+++ b/LLM_and_Enterprise_RAG_Bootcamp/Slides/Week_05_vision.pptx
@@ -3303,7 +3303,7 @@
         </p:nvSpPr>
         <p:spPr>
           <a:xfrm>
-            <a:off x="548640" y="6035040"/>
+            <a:off x="548640" y="5760720"/>
             <a:ext cx="7315200" cy="365760"/>
           </a:xfrm>
           <a:prstGeom prst="rect">
@@ -3325,7 +3325,7 @@
                 </a:solidFill>
                 <a:latin typeface="Calibri"/>
               </a:rPr>
-              <a:t>Saturday, July 4, 2026</a:t>
+              <a:t>Saturday, October 31, 2026</a:t>
             </a:r>
           </a:p>
         </p:txBody>
@@ -3338,7 +3338,7 @@
         </p:nvSpPr>
         <p:spPr>
           <a:xfrm>
-            <a:off x="548640" y="6400800"/>
+            <a:off x="548640" y="6126480"/>
             <a:ext cx="9144000" cy="365760"/>
           </a:xfrm>
           <a:prstGeom prst="rect">
@@ -3361,6 +3361,41 @@
                 <a:latin typeface="Calibri"/>
               </a:rPr>
               <a:t>LLM and Enterprise RAG Bootcamp | Instructor: Pavan R</a:t>
+            </a:r>
+          </a:p>
+        </p:txBody>
+      </p:sp>
+      <p:sp>
+        <p:nvSpPr>
+          <p:cNvPr id="9" name="TextBox 8"/>
+          <p:cNvSpPr txBox="1"/>
+          <p:nvPr/>
+        </p:nvSpPr>
+        <p:spPr>
+          <a:xfrm>
+            <a:off x="457200" y="6620256"/>
+            <a:ext cx="11247120" cy="201168"/>
+          </a:xfrm>
+          <a:prstGeom prst="rect">
+            <a:avLst/>
+          </a:prstGeom>
+          <a:noFill/>
+        </p:spPr>
+        <p:txBody>
+          <a:bodyPr wrap="square">
+            <a:spAutoFit/>
+          </a:bodyPr>
+          <a:lstStyle/>
+          <a:p>
+            <a:pPr algn="ctr"/>
+            <a:r>
+              <a:rPr sz="800" b="0">
+                <a:solidFill>
+                  <a:srgbClr val="FFFFFF"/>
+                </a:solidFill>
+                <a:latin typeface="Calibri"/>
+              </a:rPr>
+              <a:t>© 2026 Proxiant Academy | info@proxiant.com | proxiant.ai/training</a:t>
             </a:r>
           </a:p>
         </p:txBody>
@@ -3578,6 +3613,41 @@
           </a:p>
         </p:txBody>
       </p:sp>
+      <p:sp>
+        <p:nvSpPr>
+          <p:cNvPr id="7" name="TextBox 6"/>
+          <p:cNvSpPr txBox="1"/>
+          <p:nvPr/>
+        </p:nvSpPr>
+        <p:spPr>
+          <a:xfrm>
+            <a:off x="457200" y="6620256"/>
+            <a:ext cx="11247120" cy="201168"/>
+          </a:xfrm>
+          <a:prstGeom prst="rect">
+            <a:avLst/>
+          </a:prstGeom>
+          <a:noFill/>
+        </p:spPr>
+        <p:txBody>
+          <a:bodyPr wrap="square">
+            <a:spAutoFit/>
+          </a:bodyPr>
+          <a:lstStyle/>
+          <a:p>
+            <a:pPr algn="ctr"/>
+            <a:r>
+              <a:rPr sz="800" b="0">
+                <a:solidFill>
+                  <a:srgbClr val="FFFFFF"/>
+                </a:solidFill>
+                <a:latin typeface="Calibri"/>
+              </a:rPr>
+              <a:t>© 2026 Proxiant Academy | info@proxiant.com | proxiant.ai/training</a:t>
+            </a:r>
+          </a:p>
+        </p:txBody>
+      </p:sp>
     </p:spTree>
   </p:cSld>
   <p:clrMapOvr>
@@ -3791,6 +3861,41 @@
           </a:p>
         </p:txBody>
       </p:sp>
+      <p:sp>
+        <p:nvSpPr>
+          <p:cNvPr id="7" name="TextBox 6"/>
+          <p:cNvSpPr txBox="1"/>
+          <p:nvPr/>
+        </p:nvSpPr>
+        <p:spPr>
+          <a:xfrm>
+            <a:off x="457200" y="6620256"/>
+            <a:ext cx="11247120" cy="201168"/>
+          </a:xfrm>
+          <a:prstGeom prst="rect">
+            <a:avLst/>
+          </a:prstGeom>
+          <a:noFill/>
+        </p:spPr>
+        <p:txBody>
+          <a:bodyPr wrap="square">
+            <a:spAutoFit/>
+          </a:bodyPr>
+          <a:lstStyle/>
+          <a:p>
+            <a:pPr algn="ctr"/>
+            <a:r>
+              <a:rPr sz="800" b="0">
+                <a:solidFill>
+                  <a:srgbClr val="FFFFFF"/>
+                </a:solidFill>
+                <a:latin typeface="Calibri"/>
+              </a:rPr>
+              <a:t>© 2026 Proxiant Academy | info@proxiant.com | proxiant.ai/training</a:t>
+            </a:r>
+          </a:p>
+        </p:txBody>
+      </p:sp>
     </p:spTree>
   </p:cSld>
   <p:clrMapOvr>
@@ -3965,6 +4070,41 @@
           </a:p>
         </p:txBody>
       </p:sp>
+      <p:sp>
+        <p:nvSpPr>
+          <p:cNvPr id="6" name="TextBox 5"/>
+          <p:cNvSpPr txBox="1"/>
+          <p:nvPr/>
+        </p:nvSpPr>
+        <p:spPr>
+          <a:xfrm>
+            <a:off x="457200" y="6620256"/>
+            <a:ext cx="11247120" cy="201168"/>
+          </a:xfrm>
+          <a:prstGeom prst="rect">
+            <a:avLst/>
+          </a:prstGeom>
+          <a:noFill/>
+        </p:spPr>
+        <p:txBody>
+          <a:bodyPr wrap="square">
+            <a:spAutoFit/>
+          </a:bodyPr>
+          <a:lstStyle/>
+          <a:p>
+            <a:pPr algn="ctr"/>
+            <a:r>
+              <a:rPr sz="800" b="0">
+                <a:solidFill>
+                  <a:srgbClr val="1E2761"/>
+                </a:solidFill>
+                <a:latin typeface="Calibri"/>
+              </a:rPr>
+              <a:t>© 2026 Proxiant Academy | info@proxiant.com | proxiant.ai/training</a:t>
+            </a:r>
+          </a:p>
+        </p:txBody>
+      </p:sp>
     </p:spTree>
   </p:cSld>
   <p:clrMapOvr>
@@ -4178,6 +4318,41 @@
           </a:p>
         </p:txBody>
       </p:sp>
+      <p:sp>
+        <p:nvSpPr>
+          <p:cNvPr id="7" name="TextBox 6"/>
+          <p:cNvSpPr txBox="1"/>
+          <p:nvPr/>
+        </p:nvSpPr>
+        <p:spPr>
+          <a:xfrm>
+            <a:off x="457200" y="6620256"/>
+            <a:ext cx="11247120" cy="201168"/>
+          </a:xfrm>
+          <a:prstGeom prst="rect">
+            <a:avLst/>
+          </a:prstGeom>
+          <a:noFill/>
+        </p:spPr>
+        <p:txBody>
+          <a:bodyPr wrap="square">
+            <a:spAutoFit/>
+          </a:bodyPr>
+          <a:lstStyle/>
+          <a:p>
+            <a:pPr algn="ctr"/>
+            <a:r>
+              <a:rPr sz="800" b="0">
+                <a:solidFill>
+                  <a:srgbClr val="FFFFFF"/>
+                </a:solidFill>
+                <a:latin typeface="Calibri"/>
+              </a:rPr>
+              <a:t>© 2026 Proxiant Academy | info@proxiant.com | proxiant.ai/training</a:t>
+            </a:r>
+          </a:p>
+        </p:txBody>
+      </p:sp>
     </p:spTree>
   </p:cSld>
   <p:clrMapOvr>
@@ -4391,6 +4566,41 @@
           </a:p>
         </p:txBody>
       </p:sp>
+      <p:sp>
+        <p:nvSpPr>
+          <p:cNvPr id="7" name="TextBox 6"/>
+          <p:cNvSpPr txBox="1"/>
+          <p:nvPr/>
+        </p:nvSpPr>
+        <p:spPr>
+          <a:xfrm>
+            <a:off x="457200" y="6620256"/>
+            <a:ext cx="11247120" cy="201168"/>
+          </a:xfrm>
+          <a:prstGeom prst="rect">
+            <a:avLst/>
+          </a:prstGeom>
+          <a:noFill/>
+        </p:spPr>
+        <p:txBody>
+          <a:bodyPr wrap="square">
+            <a:spAutoFit/>
+          </a:bodyPr>
+          <a:lstStyle/>
+          <a:p>
+            <a:pPr algn="ctr"/>
+            <a:r>
+              <a:rPr sz="800" b="0">
+                <a:solidFill>
+                  <a:srgbClr val="FFFFFF"/>
+                </a:solidFill>
+                <a:latin typeface="Calibri"/>
+              </a:rPr>
+              <a:t>© 2026 Proxiant Academy | info@proxiant.com | proxiant.ai/training</a:t>
+            </a:r>
+          </a:p>
+        </p:txBody>
+      </p:sp>
     </p:spTree>
   </p:cSld>
   <p:clrMapOvr>
@@ -4765,6 +4975,41 @@
           </a:p>
         </p:txBody>
       </p:sp>
+      <p:sp>
+        <p:nvSpPr>
+          <p:cNvPr id="7" name="TextBox 6"/>
+          <p:cNvSpPr txBox="1"/>
+          <p:nvPr/>
+        </p:nvSpPr>
+        <p:spPr>
+          <a:xfrm>
+            <a:off x="457200" y="6620256"/>
+            <a:ext cx="11247120" cy="201168"/>
+          </a:xfrm>
+          <a:prstGeom prst="rect">
+            <a:avLst/>
+          </a:prstGeom>
+          <a:noFill/>
+        </p:spPr>
+        <p:txBody>
+          <a:bodyPr wrap="square">
+            <a:spAutoFit/>
+          </a:bodyPr>
+          <a:lstStyle/>
+          <a:p>
+            <a:pPr algn="ctr"/>
+            <a:r>
+              <a:rPr sz="800" b="0">
+                <a:solidFill>
+                  <a:srgbClr val="FFFFFF"/>
+                </a:solidFill>
+                <a:latin typeface="Calibri"/>
+              </a:rPr>
+              <a:t>© 2026 Proxiant Academy | info@proxiant.com | proxiant.ai/training</a:t>
+            </a:r>
+          </a:p>
+        </p:txBody>
+      </p:sp>
     </p:spTree>
   </p:cSld>
   <p:clrMapOvr>
@@ -4978,6 +5223,41 @@
           </a:p>
         </p:txBody>
       </p:sp>
+      <p:sp>
+        <p:nvSpPr>
+          <p:cNvPr id="7" name="TextBox 6"/>
+          <p:cNvSpPr txBox="1"/>
+          <p:nvPr/>
+        </p:nvSpPr>
+        <p:spPr>
+          <a:xfrm>
+            <a:off x="457200" y="6620256"/>
+            <a:ext cx="11247120" cy="201168"/>
+          </a:xfrm>
+          <a:prstGeom prst="rect">
+            <a:avLst/>
+          </a:prstGeom>
+          <a:noFill/>
+        </p:spPr>
+        <p:txBody>
+          <a:bodyPr wrap="square">
+            <a:spAutoFit/>
+          </a:bodyPr>
+          <a:lstStyle/>
+          <a:p>
+            <a:pPr algn="ctr"/>
+            <a:r>
+              <a:rPr sz="800" b="0">
+                <a:solidFill>
+                  <a:srgbClr val="FFFFFF"/>
+                </a:solidFill>
+                <a:latin typeface="Calibri"/>
+              </a:rPr>
+              <a:t>© 2026 Proxiant Academy | info@proxiant.com | proxiant.ai/training</a:t>
+            </a:r>
+          </a:p>
+        </p:txBody>
+      </p:sp>
     </p:spTree>
   </p:cSld>
   <p:clrMapOvr>
@@ -5191,6 +5471,41 @@
           </a:p>
         </p:txBody>
       </p:sp>
+      <p:sp>
+        <p:nvSpPr>
+          <p:cNvPr id="7" name="TextBox 6"/>
+          <p:cNvSpPr txBox="1"/>
+          <p:nvPr/>
+        </p:nvSpPr>
+        <p:spPr>
+          <a:xfrm>
+            <a:off x="457200" y="6620256"/>
+            <a:ext cx="11247120" cy="201168"/>
+          </a:xfrm>
+          <a:prstGeom prst="rect">
+            <a:avLst/>
+          </a:prstGeom>
+          <a:noFill/>
+        </p:spPr>
+        <p:txBody>
+          <a:bodyPr wrap="square">
+            <a:spAutoFit/>
+          </a:bodyPr>
+          <a:lstStyle/>
+          <a:p>
+            <a:pPr algn="ctr"/>
+            <a:r>
+              <a:rPr sz="800" b="0">
+                <a:solidFill>
+                  <a:srgbClr val="FFFFFF"/>
+                </a:solidFill>
+                <a:latin typeface="Calibri"/>
+              </a:rPr>
+              <a:t>© 2026 Proxiant Academy | info@proxiant.com | proxiant.ai/training</a:t>
+            </a:r>
+          </a:p>
+        </p:txBody>
+      </p:sp>
     </p:spTree>
   </p:cSld>
   <p:clrMapOvr>
@@ -5404,6 +5719,41 @@
           </a:p>
         </p:txBody>
       </p:sp>
+      <p:sp>
+        <p:nvSpPr>
+          <p:cNvPr id="7" name="TextBox 6"/>
+          <p:cNvSpPr txBox="1"/>
+          <p:nvPr/>
+        </p:nvSpPr>
+        <p:spPr>
+          <a:xfrm>
+            <a:off x="457200" y="6620256"/>
+            <a:ext cx="11247120" cy="201168"/>
+          </a:xfrm>
+          <a:prstGeom prst="rect">
+            <a:avLst/>
+          </a:prstGeom>
+          <a:noFill/>
+        </p:spPr>
+        <p:txBody>
+          <a:bodyPr wrap="square">
+            <a:spAutoFit/>
+          </a:bodyPr>
+          <a:lstStyle/>
+          <a:p>
+            <a:pPr algn="ctr"/>
+            <a:r>
+              <a:rPr sz="800" b="0">
+                <a:solidFill>
+                  <a:srgbClr val="FFFFFF"/>
+                </a:solidFill>
+                <a:latin typeface="Calibri"/>
+              </a:rPr>
+              <a:t>© 2026 Proxiant Academy | info@proxiant.com | proxiant.ai/training</a:t>
+            </a:r>
+          </a:p>
+        </p:txBody>
+      </p:sp>
     </p:spTree>
   </p:cSld>
   <p:clrMapOvr>
@@ -5578,6 +5928,41 @@
           </a:p>
         </p:txBody>
       </p:sp>
+      <p:sp>
+        <p:nvSpPr>
+          <p:cNvPr id="6" name="TextBox 5"/>
+          <p:cNvSpPr txBox="1"/>
+          <p:nvPr/>
+        </p:nvSpPr>
+        <p:spPr>
+          <a:xfrm>
+            <a:off x="457200" y="6620256"/>
+            <a:ext cx="11247120" cy="201168"/>
+          </a:xfrm>
+          <a:prstGeom prst="rect">
+            <a:avLst/>
+          </a:prstGeom>
+          <a:noFill/>
+        </p:spPr>
+        <p:txBody>
+          <a:bodyPr wrap="square">
+            <a:spAutoFit/>
+          </a:bodyPr>
+          <a:lstStyle/>
+          <a:p>
+            <a:pPr algn="ctr"/>
+            <a:r>
+              <a:rPr sz="800" b="0">
+                <a:solidFill>
+                  <a:srgbClr val="1E2761"/>
+                </a:solidFill>
+                <a:latin typeface="Calibri"/>
+              </a:rPr>
+              <a:t>© 2026 Proxiant Academy | info@proxiant.com | proxiant.ai/training</a:t>
+            </a:r>
+          </a:p>
+        </p:txBody>
+      </p:sp>
     </p:spTree>
   </p:cSld>
   <p:clrMapOvr>
@@ -5752,6 +6137,41 @@
           </a:p>
         </p:txBody>
       </p:sp>
+      <p:sp>
+        <p:nvSpPr>
+          <p:cNvPr id="6" name="TextBox 5"/>
+          <p:cNvSpPr txBox="1"/>
+          <p:nvPr/>
+        </p:nvSpPr>
+        <p:spPr>
+          <a:xfrm>
+            <a:off x="457200" y="6620256"/>
+            <a:ext cx="11247120" cy="201168"/>
+          </a:xfrm>
+          <a:prstGeom prst="rect">
+            <a:avLst/>
+          </a:prstGeom>
+          <a:noFill/>
+        </p:spPr>
+        <p:txBody>
+          <a:bodyPr wrap="square">
+            <a:spAutoFit/>
+          </a:bodyPr>
+          <a:lstStyle/>
+          <a:p>
+            <a:pPr algn="ctr"/>
+            <a:r>
+              <a:rPr sz="800" b="0">
+                <a:solidFill>
+                  <a:srgbClr val="1E2761"/>
+                </a:solidFill>
+                <a:latin typeface="Calibri"/>
+              </a:rPr>
+              <a:t>© 2026 Proxiant Academy | info@proxiant.com | proxiant.ai/training</a:t>
+            </a:r>
+          </a:p>
+        </p:txBody>
+      </p:sp>
     </p:spTree>
   </p:cSld>
   <p:clrMapOvr>
@@ -5965,6 +6385,41 @@
           </a:p>
         </p:txBody>
       </p:sp>
+      <p:sp>
+        <p:nvSpPr>
+          <p:cNvPr id="7" name="TextBox 6"/>
+          <p:cNvSpPr txBox="1"/>
+          <p:nvPr/>
+        </p:nvSpPr>
+        <p:spPr>
+          <a:xfrm>
+            <a:off x="457200" y="6620256"/>
+            <a:ext cx="11247120" cy="201168"/>
+          </a:xfrm>
+          <a:prstGeom prst="rect">
+            <a:avLst/>
+          </a:prstGeom>
+          <a:noFill/>
+        </p:spPr>
+        <p:txBody>
+          <a:bodyPr wrap="square">
+            <a:spAutoFit/>
+          </a:bodyPr>
+          <a:lstStyle/>
+          <a:p>
+            <a:pPr algn="ctr"/>
+            <a:r>
+              <a:rPr sz="800" b="0">
+                <a:solidFill>
+                  <a:srgbClr val="FFFFFF"/>
+                </a:solidFill>
+                <a:latin typeface="Calibri"/>
+              </a:rPr>
+              <a:t>© 2026 Proxiant Academy | info@proxiant.com | proxiant.ai/training</a:t>
+            </a:r>
+          </a:p>
+        </p:txBody>
+      </p:sp>
     </p:spTree>
   </p:cSld>
   <p:clrMapOvr>
@@ -6178,6 +6633,41 @@
           </a:p>
         </p:txBody>
       </p:sp>
+      <p:sp>
+        <p:nvSpPr>
+          <p:cNvPr id="7" name="TextBox 6"/>
+          <p:cNvSpPr txBox="1"/>
+          <p:nvPr/>
+        </p:nvSpPr>
+        <p:spPr>
+          <a:xfrm>
+            <a:off x="457200" y="6620256"/>
+            <a:ext cx="11247120" cy="201168"/>
+          </a:xfrm>
+          <a:prstGeom prst="rect">
+            <a:avLst/>
+          </a:prstGeom>
+          <a:noFill/>
+        </p:spPr>
+        <p:txBody>
+          <a:bodyPr wrap="square">
+            <a:spAutoFit/>
+          </a:bodyPr>
+          <a:lstStyle/>
+          <a:p>
+            <a:pPr algn="ctr"/>
+            <a:r>
+              <a:rPr sz="800" b="0">
+                <a:solidFill>
+                  <a:srgbClr val="FFFFFF"/>
+                </a:solidFill>
+                <a:latin typeface="Calibri"/>
+              </a:rPr>
+              <a:t>© 2026 Proxiant Academy | info@proxiant.com | proxiant.ai/training</a:t>
+            </a:r>
+          </a:p>
+        </p:txBody>
+      </p:sp>
     </p:spTree>
   </p:cSld>
   <p:clrMapOvr>
@@ -6391,6 +6881,41 @@
           </a:p>
         </p:txBody>
       </p:sp>
+      <p:sp>
+        <p:nvSpPr>
+          <p:cNvPr id="7" name="TextBox 6"/>
+          <p:cNvSpPr txBox="1"/>
+          <p:nvPr/>
+        </p:nvSpPr>
+        <p:spPr>
+          <a:xfrm>
+            <a:off x="457200" y="6620256"/>
+            <a:ext cx="11247120" cy="201168"/>
+          </a:xfrm>
+          <a:prstGeom prst="rect">
+            <a:avLst/>
+          </a:prstGeom>
+          <a:noFill/>
+        </p:spPr>
+        <p:txBody>
+          <a:bodyPr wrap="square">
+            <a:spAutoFit/>
+          </a:bodyPr>
+          <a:lstStyle/>
+          <a:p>
+            <a:pPr algn="ctr"/>
+            <a:r>
+              <a:rPr sz="800" b="0">
+                <a:solidFill>
+                  <a:srgbClr val="FFFFFF"/>
+                </a:solidFill>
+                <a:latin typeface="Calibri"/>
+              </a:rPr>
+              <a:t>© 2026 Proxiant Academy | info@proxiant.com | proxiant.ai/training</a:t>
+            </a:r>
+          </a:p>
+        </p:txBody>
+      </p:sp>
     </p:spTree>
   </p:cSld>
   <p:clrMapOvr>
@@ -6565,6 +7090,41 @@
           </a:p>
         </p:txBody>
       </p:sp>
+      <p:sp>
+        <p:nvSpPr>
+          <p:cNvPr id="6" name="TextBox 5"/>
+          <p:cNvSpPr txBox="1"/>
+          <p:nvPr/>
+        </p:nvSpPr>
+        <p:spPr>
+          <a:xfrm>
+            <a:off x="457200" y="6620256"/>
+            <a:ext cx="11247120" cy="201168"/>
+          </a:xfrm>
+          <a:prstGeom prst="rect">
+            <a:avLst/>
+          </a:prstGeom>
+          <a:noFill/>
+        </p:spPr>
+        <p:txBody>
+          <a:bodyPr wrap="square">
+            <a:spAutoFit/>
+          </a:bodyPr>
+          <a:lstStyle/>
+          <a:p>
+            <a:pPr algn="ctr"/>
+            <a:r>
+              <a:rPr sz="800" b="0">
+                <a:solidFill>
+                  <a:srgbClr val="1E2761"/>
+                </a:solidFill>
+                <a:latin typeface="Calibri"/>
+              </a:rPr>
+              <a:t>© 2026 Proxiant Academy | info@proxiant.com | proxiant.ai/training</a:t>
+            </a:r>
+          </a:p>
+        </p:txBody>
+      </p:sp>
     </p:spTree>
   </p:cSld>
   <p:clrMapOvr>
@@ -6826,6 +7386,41 @@
           </a:p>
         </p:txBody>
       </p:sp>
+      <p:sp>
+        <p:nvSpPr>
+          <p:cNvPr id="7" name="TextBox 6"/>
+          <p:cNvSpPr txBox="1"/>
+          <p:nvPr/>
+        </p:nvSpPr>
+        <p:spPr>
+          <a:xfrm>
+            <a:off x="457200" y="6620256"/>
+            <a:ext cx="11247120" cy="201168"/>
+          </a:xfrm>
+          <a:prstGeom prst="rect">
+            <a:avLst/>
+          </a:prstGeom>
+          <a:noFill/>
+        </p:spPr>
+        <p:txBody>
+          <a:bodyPr wrap="square">
+            <a:spAutoFit/>
+          </a:bodyPr>
+          <a:lstStyle/>
+          <a:p>
+            <a:pPr algn="ctr"/>
+            <a:r>
+              <a:rPr sz="800" b="0">
+                <a:solidFill>
+                  <a:srgbClr val="FFFFFF"/>
+                </a:solidFill>
+                <a:latin typeface="Calibri"/>
+              </a:rPr>
+              <a:t>© 2026 Proxiant Academy | info@proxiant.com | proxiant.ai/training</a:t>
+            </a:r>
+          </a:p>
+        </p:txBody>
+      </p:sp>
     </p:spTree>
   </p:cSld>
   <p:clrMapOvr>
@@ -7140,7 +7735,7 @@
         </p:nvSpPr>
         <p:spPr>
           <a:xfrm>
-            <a:off x="640080" y="6400800"/>
+            <a:off x="640080" y="6217920"/>
             <a:ext cx="10972800" cy="365760"/>
           </a:xfrm>
           <a:prstGeom prst="rect">
@@ -7163,6 +7758,41 @@
                 <a:latin typeface="Calibri"/>
               </a:rPr>
               <a:t>Quiz Tuesday | Project due next Saturday | Instructor: Pavan R</a:t>
+            </a:r>
+          </a:p>
+        </p:txBody>
+      </p:sp>
+      <p:sp>
+        <p:nvSpPr>
+          <p:cNvPr id="11" name="TextBox 10"/>
+          <p:cNvSpPr txBox="1"/>
+          <p:nvPr/>
+        </p:nvSpPr>
+        <p:spPr>
+          <a:xfrm>
+            <a:off x="457200" y="6620256"/>
+            <a:ext cx="11247120" cy="201168"/>
+          </a:xfrm>
+          <a:prstGeom prst="rect">
+            <a:avLst/>
+          </a:prstGeom>
+          <a:noFill/>
+        </p:spPr>
+        <p:txBody>
+          <a:bodyPr wrap="square">
+            <a:spAutoFit/>
+          </a:bodyPr>
+          <a:lstStyle/>
+          <a:p>
+            <a:pPr algn="ctr"/>
+            <a:r>
+              <a:rPr sz="800" b="0">
+                <a:solidFill>
+                  <a:srgbClr val="FFFFFF"/>
+                </a:solidFill>
+                <a:latin typeface="Calibri"/>
+              </a:rPr>
+              <a:t>© 2026 Proxiant Academy | info@proxiant.com | proxiant.ai/training</a:t>
             </a:r>
           </a:p>
         </p:txBody>
@@ -7380,6 +8010,41 @@
           </a:p>
         </p:txBody>
       </p:sp>
+      <p:sp>
+        <p:nvSpPr>
+          <p:cNvPr id="7" name="TextBox 6"/>
+          <p:cNvSpPr txBox="1"/>
+          <p:nvPr/>
+        </p:nvSpPr>
+        <p:spPr>
+          <a:xfrm>
+            <a:off x="457200" y="6620256"/>
+            <a:ext cx="11247120" cy="201168"/>
+          </a:xfrm>
+          <a:prstGeom prst="rect">
+            <a:avLst/>
+          </a:prstGeom>
+          <a:noFill/>
+        </p:spPr>
+        <p:txBody>
+          <a:bodyPr wrap="square">
+            <a:spAutoFit/>
+          </a:bodyPr>
+          <a:lstStyle/>
+          <a:p>
+            <a:pPr algn="ctr"/>
+            <a:r>
+              <a:rPr sz="800" b="0">
+                <a:solidFill>
+                  <a:srgbClr val="FFFFFF"/>
+                </a:solidFill>
+                <a:latin typeface="Calibri"/>
+              </a:rPr>
+              <a:t>© 2026 Proxiant Academy | info@proxiant.com | proxiant.ai/training</a:t>
+            </a:r>
+          </a:p>
+        </p:txBody>
+      </p:sp>
     </p:spTree>
   </p:cSld>
   <p:clrMapOvr>
@@ -7657,6 +8322,41 @@
           </a:p>
         </p:txBody>
       </p:sp>
+      <p:sp>
+        <p:nvSpPr>
+          <p:cNvPr id="7" name="TextBox 6"/>
+          <p:cNvSpPr txBox="1"/>
+          <p:nvPr/>
+        </p:nvSpPr>
+        <p:spPr>
+          <a:xfrm>
+            <a:off x="457200" y="6620256"/>
+            <a:ext cx="11247120" cy="201168"/>
+          </a:xfrm>
+          <a:prstGeom prst="rect">
+            <a:avLst/>
+          </a:prstGeom>
+          <a:noFill/>
+        </p:spPr>
+        <p:txBody>
+          <a:bodyPr wrap="square">
+            <a:spAutoFit/>
+          </a:bodyPr>
+          <a:lstStyle/>
+          <a:p>
+            <a:pPr algn="ctr"/>
+            <a:r>
+              <a:rPr sz="800" b="0">
+                <a:solidFill>
+                  <a:srgbClr val="FFFFFF"/>
+                </a:solidFill>
+                <a:latin typeface="Calibri"/>
+              </a:rPr>
+              <a:t>© 2026 Proxiant Academy | info@proxiant.com | proxiant.ai/training</a:t>
+            </a:r>
+          </a:p>
+        </p:txBody>
+      </p:sp>
     </p:spTree>
   </p:cSld>
   <p:clrMapOvr>
@@ -7831,6 +8531,41 @@
           </a:p>
         </p:txBody>
       </p:sp>
+      <p:sp>
+        <p:nvSpPr>
+          <p:cNvPr id="6" name="TextBox 5"/>
+          <p:cNvSpPr txBox="1"/>
+          <p:nvPr/>
+        </p:nvSpPr>
+        <p:spPr>
+          <a:xfrm>
+            <a:off x="457200" y="6620256"/>
+            <a:ext cx="11247120" cy="201168"/>
+          </a:xfrm>
+          <a:prstGeom prst="rect">
+            <a:avLst/>
+          </a:prstGeom>
+          <a:noFill/>
+        </p:spPr>
+        <p:txBody>
+          <a:bodyPr wrap="square">
+            <a:spAutoFit/>
+          </a:bodyPr>
+          <a:lstStyle/>
+          <a:p>
+            <a:pPr algn="ctr"/>
+            <a:r>
+              <a:rPr sz="800" b="0">
+                <a:solidFill>
+                  <a:srgbClr val="1E2761"/>
+                </a:solidFill>
+                <a:latin typeface="Calibri"/>
+              </a:rPr>
+              <a:t>© 2026 Proxiant Academy | info@proxiant.com | proxiant.ai/training</a:t>
+            </a:r>
+          </a:p>
+        </p:txBody>
+      </p:sp>
     </p:spTree>
   </p:cSld>
   <p:clrMapOvr>
@@ -8044,6 +8779,41 @@
           </a:p>
         </p:txBody>
       </p:sp>
+      <p:sp>
+        <p:nvSpPr>
+          <p:cNvPr id="7" name="TextBox 6"/>
+          <p:cNvSpPr txBox="1"/>
+          <p:nvPr/>
+        </p:nvSpPr>
+        <p:spPr>
+          <a:xfrm>
+            <a:off x="457200" y="6620256"/>
+            <a:ext cx="11247120" cy="201168"/>
+          </a:xfrm>
+          <a:prstGeom prst="rect">
+            <a:avLst/>
+          </a:prstGeom>
+          <a:noFill/>
+        </p:spPr>
+        <p:txBody>
+          <a:bodyPr wrap="square">
+            <a:spAutoFit/>
+          </a:bodyPr>
+          <a:lstStyle/>
+          <a:p>
+            <a:pPr algn="ctr"/>
+            <a:r>
+              <a:rPr sz="800" b="0">
+                <a:solidFill>
+                  <a:srgbClr val="FFFFFF"/>
+                </a:solidFill>
+                <a:latin typeface="Calibri"/>
+              </a:rPr>
+              <a:t>© 2026 Proxiant Academy | info@proxiant.com | proxiant.ai/training</a:t>
+            </a:r>
+          </a:p>
+        </p:txBody>
+      </p:sp>
     </p:spTree>
   </p:cSld>
   <p:clrMapOvr>
@@ -8257,6 +9027,41 @@
           </a:p>
         </p:txBody>
       </p:sp>
+      <p:sp>
+        <p:nvSpPr>
+          <p:cNvPr id="7" name="TextBox 6"/>
+          <p:cNvSpPr txBox="1"/>
+          <p:nvPr/>
+        </p:nvSpPr>
+        <p:spPr>
+          <a:xfrm>
+            <a:off x="457200" y="6620256"/>
+            <a:ext cx="11247120" cy="201168"/>
+          </a:xfrm>
+          <a:prstGeom prst="rect">
+            <a:avLst/>
+          </a:prstGeom>
+          <a:noFill/>
+        </p:spPr>
+        <p:txBody>
+          <a:bodyPr wrap="square">
+            <a:spAutoFit/>
+          </a:bodyPr>
+          <a:lstStyle/>
+          <a:p>
+            <a:pPr algn="ctr"/>
+            <a:r>
+              <a:rPr sz="800" b="0">
+                <a:solidFill>
+                  <a:srgbClr val="FFFFFF"/>
+                </a:solidFill>
+                <a:latin typeface="Calibri"/>
+              </a:rPr>
+              <a:t>© 2026 Proxiant Academy | info@proxiant.com | proxiant.ai/training</a:t>
+            </a:r>
+          </a:p>
+        </p:txBody>
+      </p:sp>
     </p:spTree>
   </p:cSld>
   <p:clrMapOvr>
@@ -8470,6 +9275,41 @@
           </a:p>
         </p:txBody>
       </p:sp>
+      <p:sp>
+        <p:nvSpPr>
+          <p:cNvPr id="7" name="TextBox 6"/>
+          <p:cNvSpPr txBox="1"/>
+          <p:nvPr/>
+        </p:nvSpPr>
+        <p:spPr>
+          <a:xfrm>
+            <a:off x="457200" y="6620256"/>
+            <a:ext cx="11247120" cy="201168"/>
+          </a:xfrm>
+          <a:prstGeom prst="rect">
+            <a:avLst/>
+          </a:prstGeom>
+          <a:noFill/>
+        </p:spPr>
+        <p:txBody>
+          <a:bodyPr wrap="square">
+            <a:spAutoFit/>
+          </a:bodyPr>
+          <a:lstStyle/>
+          <a:p>
+            <a:pPr algn="ctr"/>
+            <a:r>
+              <a:rPr sz="800" b="0">
+                <a:solidFill>
+                  <a:srgbClr val="FFFFFF"/>
+                </a:solidFill>
+                <a:latin typeface="Calibri"/>
+              </a:rPr>
+              <a:t>© 2026 Proxiant Academy | info@proxiant.com | proxiant.ai/training</a:t>
+            </a:r>
+          </a:p>
+        </p:txBody>
+      </p:sp>
     </p:spTree>
   </p:cSld>
   <p:clrMapOvr>
@@ -8680,6 +9520,41 @@
           <a:lstStyle/>
           <a:p>
             <a:pPr algn="ctr"/>
+          </a:p>
+        </p:txBody>
+      </p:sp>
+      <p:sp>
+        <p:nvSpPr>
+          <p:cNvPr id="7" name="TextBox 6"/>
+          <p:cNvSpPr txBox="1"/>
+          <p:nvPr/>
+        </p:nvSpPr>
+        <p:spPr>
+          <a:xfrm>
+            <a:off x="457200" y="6620256"/>
+            <a:ext cx="11247120" cy="201168"/>
+          </a:xfrm>
+          <a:prstGeom prst="rect">
+            <a:avLst/>
+          </a:prstGeom>
+          <a:noFill/>
+        </p:spPr>
+        <p:txBody>
+          <a:bodyPr wrap="square">
+            <a:spAutoFit/>
+          </a:bodyPr>
+          <a:lstStyle/>
+          <a:p>
+            <a:pPr algn="ctr"/>
+            <a:r>
+              <a:rPr sz="800" b="0">
+                <a:solidFill>
+                  <a:srgbClr val="FFFFFF"/>
+                </a:solidFill>
+                <a:latin typeface="Calibri"/>
+              </a:rPr>
+              <a:t>© 2026 Proxiant Academy | info@proxiant.com | proxiant.ai/training</a:t>
+            </a:r>
           </a:p>
         </p:txBody>
       </p:sp>
